--- a/Digits on Demand.pptx
+++ b/Digits on Demand.pptx
@@ -2226,7 +2226,7 @@
                   <a:srgbClr val="BFC8DC"/>
                 </a:solidFill>
               </a:rPr>
-              <a:t>Downloaded: the dataset and a reference repo for comparison (TeaPearce/Conditional_Diffusion_MNIST). Built: my own denoiser, conditioning and training loop—the part that earns the grade.</a:t>
+              <a:t>Downloaded: the dataset and a reference repo for comparison (TeaPearce/Conditional_Diffusion_MNIST). Built: AI-assisted code — read, verified, and edited by me; every design decision is mine to defend.</a:t>
             </a:r>
             <a:endParaRPr lang="en-US" sz="1400" dirty="0"/>
           </a:p>
